--- a/docs/04_presentations/막지스톡_기업대표_서비스기획_발표v5.0.pptx
+++ b/docs/04_presentations/막지스톡_기업대표_서비스기획_발표v5.0.pptx
@@ -517,7 +517,12 @@
           <a:lstStyle/>
           <a:p>
             <a:r>
-              <a:t>[30초] 오늘 말씀드릴 것은 세 가지입니다. 시장에 기회가 있고, 우리는 그 기회를 ‘가격’으로 잡으려 하며, 그 방식이 마진을 지킨다는 것입니다. 마지막에 세 가지 요청을 드리겠습니다.</a:t>
+              <a:t>[오프닝 멘트] 주식 앱은 하루에도 몇 번씩 열어 보시죠? 빵값은 어떨까요? 오늘은 그 이야기를 해 보려고 합니다.</a:t>
+            </a:r>
+          </a:p>
+          <a:p>
+            <a:r>
+              <a:t>[핵심] 오늘 말씀드릴 것은 세 가지입니다. 시장에 기회가 있고, 우리는 그 기회를 ‘가격’으로 잡으려 하며, 그 방식이 마진을 지킨다는 것입니다. 마지막에 세 가지 요청을 드리겠습니다.</a:t>
             </a:r>
           </a:p>
         </p:txBody>
@@ -592,6 +597,11 @@
           </a:p>
           <a:p>
             <a:r>
+              <a:t>[멘트] 마진은 대표님이 가장 먼저 물으실 것 같아서 저희가 먼저 계산해 봤습니다.</a:t>
+            </a:r>
+          </a:p>
+          <a:p>
+            <a:r>
               <a:t>[근거] 정가 마진을 40%로 가정해도 가장 깊은 세션의 마진은 3.2%로 흑자이고, 평균 할인 15%에서는 마진율이 29~53%로 유지됩니다. 손익분기 판매량은 마진 50%면 +43%, 60%면 +33%, 40%면 +60%입니다. 실제 원가 자료가 없어 40/50/60% 가정이라는 점을 말씀드립니다.</a:t>
             </a:r>
           </a:p>
@@ -832,6 +842,11 @@
           </a:p>
           <a:p>
             <a:r>
+              <a:t>[멘트] 숫자는 일부러 낙관적으로 그리지 않았습니다. 시장이 커진다는 가정은 뺐습니다.</a:t>
+            </a:r>
+          </a:p>
+          <a:p>
+            <a:r>
               <a:t>[근거] 매출은 유입 × 전환율 × 객단가(5월 2.32만 원)입니다. TAM 13.6조, SAM 2,100~2,650억에서 시장 성장은 넣지 않고 점유율만 0.5%에서 3%로 넓혔습니다. Worst는 2.8억, Best는 35.3억이고, 망넛이네·널담의 초기 실적은 확정 전망이 아닌 성공 벤치마크입니다.</a:t>
             </a:r>
           </a:p>
@@ -912,6 +927,11 @@
           </a:p>
           <a:p>
             <a:r>
+              <a:t>[멘트] 리스크는 숨기지 않고 먼저 말씀드리겠습니다.</a:t>
+            </a:r>
+          </a:p>
+          <a:p>
+            <a:r>
               <a:t>[근거] 막지스톡과 자사몰 결제가 분리된 것은 RFP가 정한 구조라 원클릭·자동 인식으로 줄이기만 합니다. HIGH는 키워드 적합성, 표시가·결제가 불일치, 법적 위험 세 가지이고, 나머지 둘(가격모델 재검증, 쿠폰 중복)은 관리 중입니다. 대응은 상한 38%, 표시가=결제가 검증, 법무 검토, 백테스트 재실행입니다.</a:t>
             </a:r>
           </a:p>
@@ -992,6 +1012,11 @@
           </a:p>
           <a:p>
             <a:r>
+              <a:t>[멘트] 요청은 세 가지입니다. 하나씩 여쭙겠습니다.</a:t>
+            </a:r>
+          </a:p>
+          <a:p>
+            <a:r>
               <a:t>[근거] 지금은 마진율을 40/50/60%로 가정했고, 실제 수치를 주시면 마진 방어를 정밀 검증하겠습니다. 로드맵은 MVP, 참여 기능, 자사몰 실연동의 3단계입니다. 향후 확장(Bakery ETF·FX Bakery·Bread Index)은 설계 단계입니다.</a:t>
             </a:r>
           </a:p>
@@ -1067,6 +1092,11 @@
           <a:lstStyle/>
           <a:p>
             <a:r>
+              <a:t>[클로징 멘트] 가격이 움직이니 손님도 움직입니다. 질문 주시면 저도 움직이겠습니다.</a:t>
+            </a:r>
+          </a:p>
+          <a:p>
+            <a:r>
               <a:t>[Q&amp;A] 예상 질문은 발표 스토리라인 문서의 ‘예상 질문과 답변’을 참고하세요.</a:t>
             </a:r>
           </a:p>
@@ -1222,6 +1252,11 @@
           </a:p>
           <a:p>
             <a:r>
+              <a:t>[멘트] 출근길엔 눈으로 장바구니를 채우고, 퇴근하고 나서야 지갑이 열린다는 얘기입니다.</a:t>
+            </a:r>
+          </a:p>
+          <a:p>
+            <a:r>
               <a:t>[근거] 5월 데이터에서 로그인은 오전 8~10시에 25.6%가 몰렸지만 그 시간 결제금액은 8.0%뿐이고, 저녁 20~24시에는 로그인 20.0%에 결제금액 28.4%입니다. 막지는 저당·무설탕·글루텐프리 웰니스 베이커리로 B2B에서 제품력을 검증했지만, 자사몰에서는 관심이 생긴 순간 구매로 이어지지 못하고 있습니다.</a:t>
             </a:r>
           </a:p>
@@ -1302,6 +1337,11 @@
           </a:p>
           <a:p>
             <a:r>
+              <a:t>[멘트] 손님이 구경하고 결제하기까지 대략 열두 시간이 비어 있는 셈입니다.</a:t>
+            </a:r>
+          </a:p>
+          <a:p>
+            <a:r>
               <a:t>[근거] 첫째 자사몰 유입이 최우선입니다. 광고를 켠 날에만 팔리는 구조가 아니라 고객이 스스로 찾아오게 합니다. 둘째 체류시간과 전환율입니다. 가격을 확인하고 비교하다가 구매까지 가게 합니다.</a:t>
             </a:r>
           </a:p>
@@ -1382,6 +1422,11 @@
           </a:p>
           <a:p>
             <a:r>
+              <a:t>[멘트] ‘빵값을 주식처럼’이라고 하면 투자를 떠올리실 수 있는데, 빵에 투자하시라는 얘기가 아닙니다. 더 싸게 사는 타이밍을 알려 드린다는 뜻입니다. 투자가 아니라 할인입니다.</a:t>
+            </a:r>
+          </a:p>
+          <a:p>
+            <a:r>
               <a:t>[근거] 전략 하나, 가격 자체를 콘텐츠로 — 빵값이 하루 두 번 바뀌어 ‘오늘은 얼마일까?’가 방문 이유가 됩니다. 전략 둘, 고객이 직접 고르는 혜택 — 잠금이나 예측 중 원하는 방식으로 혜택을 받아 주도성을 느낍니다. 경쟁 6곳 중 가격 변동 자체를 콘텐츠로 쓰는 곳은 아직 없습니다.</a:t>
             </a:r>
           </a:p>
@@ -1462,6 +1507,11 @@
           </a:p>
           <a:p>
             <a:r>
+              <a:t>[멘트] 쉽게 말해 잠금은 ‘이 가격에 찜’입니다. 아침에 점찍은 빵을 저녁에 더 비싸게 만나지 않게 해 드립니다.</a:t>
+            </a:r>
+          </a:p>
+          <a:p>
+            <a:r>
               <a:t>[근거] 6시 오전장에서 시세를 보고 빵 하나를 잠급니다. 16시 오후장에서 잠금이 정산되고 자사몰에서 결제합니다. 다음 날 6시에는 예측 결과를 보러 다시 옵니다. 6시와 16시는 5월에 확인한 로그인 피크(8~10시)와 결제 피크(20~24시) 직전입니다. 기능은 세 가지 — 오늘의 시세, 가격 잠금, 오늘의 보상 고르기이고, 잠금 때문에 손해 보는 경우는 없습니다.</a:t>
             </a:r>
           </a:p>
@@ -1622,6 +1672,11 @@
           </a:p>
           <a:p>
             <a:r>
+              <a:t>[멘트] 가격이 매일 바뀌면 ‘나만 모르고 비싸게 샀나’ 싶으실 수 있습니다. 그래서 왜 바뀌는지를 아예 공개합니다.</a:t>
+            </a:r>
+          </a:p>
+          <a:p>
+            <a:r>
               <a:t>[근거] 신호는 두 개입니다. 검색지수(수요)는 최대 15% 할인을 더하고, 환율(원가)은 내리면 하락률의 14배를 전부 돌려주고 오르면 7배, 절반만 반영합니다. 합계는 0~38%로 고정되어 정가를 넘지 않습니다. 모닝롤은 정가 4,500원이 평균 할인에서 3,830원, 최대 할인에서 2,790원입니다. 나머지 5종도 같은 산식입니다.</a:t>
             </a:r>
           </a:p>
@@ -1698,6 +1753,11 @@
           <a:p>
             <a:r>
               <a:t>[핵심] 실제로 91일을 돌려 보니 평균 할인은 15%, 세션의 84%가 20% 미만이었습니다.</a:t>
+            </a:r>
+          </a:p>
+          <a:p>
+            <a:r>
+              <a:t>[멘트] 매일이 대박 세일은 아닙니다. 25%를 넘는 날은 182번 중 7번입니다.</a:t>
             </a:r>
           </a:p>
           <a:p>
